--- a/day2-deck/decks/Agenda - Preview.pptx
+++ b/day2-deck/decks/Agenda - Preview.pptx
@@ -2223,7 +2223,7 @@
                 <a:ea typeface="Inter" pitchFamily="34" charset="-122"/>
                 <a:cs typeface="Inter" pitchFamily="34" charset="-120"/>
               </a:rPr>
-              <a:t>What changed, and what we commit to.</a:t>
+              <a:t>What changed, where the money is, and what we commit to.</a:t>
             </a:r>
             <a:endParaRPr lang="en-US" sz="1400" dirty="0"/>
           </a:p>
